--- a/decks/hist-mughal-india/hist-mughal-india_ch1_babur.pptx
+++ b/decks/hist-mughal-india/hist-mughal-india_ch1_babur.pptx
@@ -125,29 +125,29 @@
   <p:extLst>
     <p:ext uri="{521415D9-36F7-43E2-AB2F-B90AF26B5E84}">
       <p14:sectionLst xmlns:p14="http://schemas.microsoft.com/office/powerpoint/2010/main">
-        <p14:section name="Opening" id="{8a7d8129-d0a0-fe9a-fdae-ace5c513efaa}">
+        <p14:section name="Opening" id="{a6723fbc-5a0e-172b-87f6-86b62afdff55}">
           <p14:sldIdLst>
             <p14:sldId id="256"/>
           </p14:sldIdLst>
         </p14:section>
-        <p14:section name="Gate" id="{9c4df0a3-2118-c669-aa2f-7c1117516bf1}">
+        <p14:section name="Gate" id="{db637721-eb53-beb9-b2c4-f3f464c3d7ea}">
           <p14:sldIdLst>
             <p14:sldId id="257"/>
             <p14:sldId id="258"/>
           </p14:sldIdLst>
         </p14:section>
-        <p14:section name="Pre-teach" id="{2e49d708-a905-c7ad-ee51-f40d8a475310}">
+        <p14:section name="Pre-teach" id="{59682281-e9f1-7a23-e261-8ec478a952ef}">
           <p14:sldIdLst>
             <p14:sldId id="259"/>
           </p14:sldIdLst>
         </p14:section>
-        <p14:section name="Read-along" id="{27af3a4d-049c-98a1-d82b-465406e7cadc}">
+        <p14:section name="Read-along" id="{9430f4cd-2f4e-b1bf-6dd4-17dfce0debb8}">
           <p14:sldIdLst>
             <p14:sldId id="260"/>
             <p14:sldId id="261"/>
           </p14:sldIdLst>
         </p14:section>
-        <p14:section name="Teach" id="{4e7bfc06-82f6-ec16-e588-32b8fc5cee1b}">
+        <p14:section name="Teach" id="{95dfedc0-da48-05c7-5cf7-635e2509f6b8}">
           <p14:sldIdLst>
             <p14:sldId id="262"/>
             <p14:sldId id="263"/>
@@ -156,7 +156,7 @@
             <p14:sldId id="266"/>
           </p14:sldIdLst>
         </p14:section>
-        <p14:section name="Routes" id="{62e00d1f-592a-31b1-dcec-5d0ead3568be}">
+        <p14:section name="Routes" id="{a34cacd4-874b-ad11-7676-bce07a36e43a}">
           <p14:sldIdLst>
             <p14:sldId id="267"/>
             <p14:sldId id="268"/>
@@ -164,12 +164,12 @@
             <p14:sldId id="270"/>
           </p14:sldIdLst>
         </p14:section>
-        <p14:section name="Close" id="{c1797987-1d38-5f56-da75-a2e222501c1f}">
+        <p14:section name="Close" id="{8487e0fe-8623-3e4f-7311-8c4da9130d19}">
           <p14:sldIdLst>
             <p14:sldId id="271"/>
           </p14:sldIdLst>
         </p14:section>
-        <p14:section name="Answers" id="{4052cd1a-2bd2-b04b-8a51-12f514033555}">
+        <p14:section name="Answers" id="{27388753-6ca0-ce26-baf9-863bc1fc2c48}">
           <p14:sldIdLst>
             <p14:sldId id="272"/>
             <p14:sldId id="273"/>
